--- a/Slides/Module 03.2 Code Coverage.pptx
+++ b/Slides/Module 03.2 Code Coverage.pptx
@@ -286,7 +286,7 @@
           <a:p>
             <a:fld id="{7C7E5181-6CF5-45F7-A87A-E0E0B1FD7549}" type="datetimeFigureOut">
               <a:rPr lang="en-US" smtClean="0"/>
-              <a:t>1/12/26</a:t>
+              <a:t>1/15/2026</a:t>
             </a:fld>
             <a:endParaRPr lang="en-US"/>
           </a:p>
@@ -3486,7 +3486,7 @@
           <a:p>
             <a:fld id="{5D2A64DE-480B-420F-9649-4F8E696E08E0}" type="datetime1">
               <a:rPr lang="en-US" smtClean="0"/>
-              <a:t>1/12/26</a:t>
+              <a:t>1/15/2026</a:t>
             </a:fld>
             <a:endParaRPr lang="en-US"/>
           </a:p>
@@ -3810,7 +3810,7 @@
           <a:p>
             <a:fld id="{EA476A42-A091-4468-A075-64A31BE59948}" type="datetime1">
               <a:rPr lang="en-US" smtClean="0"/>
-              <a:t>1/12/26</a:t>
+              <a:t>1/15/2026</a:t>
             </a:fld>
             <a:endParaRPr lang="en-US"/>
           </a:p>
@@ -4008,7 +4008,7 @@
           <a:p>
             <a:fld id="{0D3616D0-8311-4107-9726-6B805E7D05BA}" type="datetime1">
               <a:rPr lang="en-US" smtClean="0"/>
-              <a:t>1/12/26</a:t>
+              <a:t>1/15/2026</a:t>
             </a:fld>
             <a:endParaRPr lang="en-US"/>
           </a:p>
@@ -4216,7 +4216,7 @@
           <a:p>
             <a:fld id="{3BC2557A-5C88-417A-A763-5AC779462A5F}" type="datetime1">
               <a:rPr lang="en-US" smtClean="0"/>
-              <a:t>1/12/26</a:t>
+              <a:t>1/15/2026</a:t>
             </a:fld>
             <a:endParaRPr lang="en-US"/>
           </a:p>
@@ -4638,7 +4638,7 @@
           <a:p>
             <a:fld id="{07C7BFD4-467E-4EDE-93EA-052F5B39A4E5}" type="datetime1">
               <a:rPr lang="en-US" smtClean="0"/>
-              <a:t>1/12/26</a:t>
+              <a:t>1/15/2026</a:t>
             </a:fld>
             <a:endParaRPr lang="en-US"/>
           </a:p>
@@ -4888,7 +4888,7 @@
           <a:p>
             <a:fld id="{07C7BFD4-467E-4EDE-93EA-052F5B39A4E5}" type="datetime1">
               <a:rPr lang="en-US" smtClean="0"/>
-              <a:t>1/12/26</a:t>
+              <a:t>1/15/2026</a:t>
             </a:fld>
             <a:endParaRPr lang="en-US"/>
           </a:p>
@@ -5070,7 +5070,7 @@
           <a:p>
             <a:fld id="{109E55A0-C911-4F03-82FC-7E5926047D46}" type="datetime1">
               <a:rPr lang="en-US" smtClean="0"/>
-              <a:t>1/12/26</a:t>
+              <a:t>1/15/2026</a:t>
             </a:fld>
             <a:endParaRPr lang="en-US"/>
           </a:p>
@@ -5383,7 +5383,7 @@
           <a:p>
             <a:fld id="{A533CBE2-D5BE-47AC-ADC2-9CDFC1D0CF90}" type="datetime1">
               <a:rPr lang="en-US" smtClean="0"/>
-              <a:t>1/12/26</a:t>
+              <a:t>1/15/2026</a:t>
             </a:fld>
             <a:endParaRPr lang="en-US"/>
           </a:p>
@@ -5684,7 +5684,7 @@
           <a:p>
             <a:fld id="{39B7EDB1-CE74-4951-85A2-0B01C2128E28}" type="datetime1">
               <a:rPr lang="en-US" smtClean="0"/>
-              <a:t>1/12/26</a:t>
+              <a:t>1/15/2026</a:t>
             </a:fld>
             <a:endParaRPr lang="en-US"/>
           </a:p>
@@ -6132,7 +6132,7 @@
           <a:p>
             <a:fld id="{2BC7EB92-A5C2-4807-A9DC-9EDE6CBFB241}" type="datetime1">
               <a:rPr lang="en-US" smtClean="0"/>
-              <a:t>1/12/26</a:t>
+              <a:t>1/15/2026</a:t>
             </a:fld>
             <a:endParaRPr lang="en-US"/>
           </a:p>
@@ -6245,7 +6245,7 @@
           <a:p>
             <a:fld id="{2B7B7EE0-7771-4CD5-9B2B-3550753A54A1}" type="datetime1">
               <a:rPr lang="en-US" smtClean="0"/>
-              <a:t>1/12/26</a:t>
+              <a:t>1/15/2026</a:t>
             </a:fld>
             <a:endParaRPr lang="en-US"/>
           </a:p>
@@ -6556,7 +6556,7 @@
           <a:p>
             <a:fld id="{F8B318B3-0E87-4416-A9B8-D891968C2727}" type="datetime1">
               <a:rPr lang="en-US" smtClean="0"/>
-              <a:t>1/12/26</a:t>
+              <a:t>1/15/2026</a:t>
             </a:fld>
             <a:endParaRPr lang="en-US"/>
           </a:p>
@@ -6797,7 +6797,7 @@
           <a:p>
             <a:fld id="{54D997E8-DDEE-43F1-8D9B-F8A1E11DE488}" type="datetime1">
               <a:rPr lang="en-US" smtClean="0"/>
-              <a:t>1/12/26</a:t>
+              <a:t>1/15/2026</a:t>
             </a:fld>
             <a:endParaRPr lang="en-US"/>
           </a:p>
@@ -10425,7 +10425,7 @@
           </a:ln>
           <a:extLst>
             <a:ext uri="{C572A759-6A51-4108-AA02-DFA0A04FC94B}">
-              <ma14:wrappingTextBoxFlag xmlns:ma14="http://schemas.microsoft.com/office/mac/drawingml/2011/main" xmlns:a14="http://schemas.microsoft.com/office/drawing/2010/main" xmlns:m="http://schemas.openxmlformats.org/officeDocument/2006/math" xmlns="" val="1"/>
+              <ma14:wrappingTextBoxFlag xmlns="" xmlns:m="http://schemas.openxmlformats.org/officeDocument/2006/math" xmlns:a14="http://schemas.microsoft.com/office/drawing/2010/main" xmlns:ma14="http://schemas.microsoft.com/office/mac/drawingml/2011/main" val="1"/>
             </a:ext>
           </a:extLst>
         </p:spPr>
@@ -10763,7 +10763,7 @@
           </a:ln>
           <a:extLst>
             <a:ext uri="{C572A759-6A51-4108-AA02-DFA0A04FC94B}">
-              <ma14:wrappingTextBoxFlag xmlns:ma14="http://schemas.microsoft.com/office/mac/drawingml/2011/main" xmlns:a14="http://schemas.microsoft.com/office/drawing/2010/main" xmlns:m="http://schemas.openxmlformats.org/officeDocument/2006/math" xmlns="" val="1"/>
+              <ma14:wrappingTextBoxFlag xmlns="" xmlns:m="http://schemas.openxmlformats.org/officeDocument/2006/math" xmlns:a14="http://schemas.microsoft.com/office/drawing/2010/main" xmlns:ma14="http://schemas.microsoft.com/office/mac/drawingml/2011/main" val="1"/>
             </a:ext>
           </a:extLst>
         </p:spPr>
@@ -11188,7 +11188,7 @@
           </a:ln>
           <a:extLst>
             <a:ext uri="{C572A759-6A51-4108-AA02-DFA0A04FC94B}">
-              <ma14:wrappingTextBoxFlag xmlns:ma14="http://schemas.microsoft.com/office/mac/drawingml/2011/main" xmlns:a14="http://schemas.microsoft.com/office/drawing/2010/main" xmlns:m="http://schemas.openxmlformats.org/officeDocument/2006/math" xmlns="" val="1"/>
+              <ma14:wrappingTextBoxFlag xmlns="" xmlns:m="http://schemas.openxmlformats.org/officeDocument/2006/math" xmlns:a14="http://schemas.microsoft.com/office/drawing/2010/main" xmlns:ma14="http://schemas.microsoft.com/office/mac/drawingml/2011/main" val="1"/>
             </a:ext>
           </a:extLst>
         </p:spPr>
@@ -11225,7 +11225,7 @@
           </a:ln>
           <a:extLst>
             <a:ext uri="{C572A759-6A51-4108-AA02-DFA0A04FC94B}">
-              <ma14:wrappingTextBoxFlag xmlns:ma14="http://schemas.microsoft.com/office/mac/drawingml/2011/main" xmlns:a14="http://schemas.microsoft.com/office/drawing/2010/main" xmlns:m="http://schemas.openxmlformats.org/officeDocument/2006/math" xmlns="" val="1"/>
+              <ma14:wrappingTextBoxFlag xmlns="" xmlns:m="http://schemas.openxmlformats.org/officeDocument/2006/math" xmlns:a14="http://schemas.microsoft.com/office/drawing/2010/main" xmlns:ma14="http://schemas.microsoft.com/office/mac/drawingml/2011/main" val="1"/>
             </a:ext>
           </a:extLst>
         </p:spPr>
@@ -11288,7 +11288,7 @@
             </a:ln>
             <a:extLst>
               <a:ext uri="{C572A759-6A51-4108-AA02-DFA0A04FC94B}">
-                <ma14:wrappingTextBoxFlag xmlns:ma14="http://schemas.microsoft.com/office/mac/drawingml/2011/main" xmlns:a14="http://schemas.microsoft.com/office/drawing/2010/main" xmlns:m="http://schemas.openxmlformats.org/officeDocument/2006/math" xmlns="" val="1"/>
+                <ma14:wrappingTextBoxFlag xmlns="" xmlns:m="http://schemas.openxmlformats.org/officeDocument/2006/math" xmlns:a14="http://schemas.microsoft.com/office/drawing/2010/main" xmlns:ma14="http://schemas.microsoft.com/office/mac/drawingml/2011/main" val="1"/>
               </a:ext>
             </a:extLst>
           </p:spPr>
@@ -11919,7 +11919,7 @@
           </a:ln>
           <a:extLst>
             <a:ext uri="{C572A759-6A51-4108-AA02-DFA0A04FC94B}">
-              <ma14:wrappingTextBoxFlag xmlns:ma14="http://schemas.microsoft.com/office/mac/drawingml/2011/main" xmlns:a14="http://schemas.microsoft.com/office/drawing/2010/main" xmlns:m="http://schemas.openxmlformats.org/officeDocument/2006/math" xmlns="" val="1"/>
+              <ma14:wrappingTextBoxFlag xmlns="" xmlns:m="http://schemas.openxmlformats.org/officeDocument/2006/math" xmlns:a14="http://schemas.microsoft.com/office/drawing/2010/main" xmlns:ma14="http://schemas.microsoft.com/office/mac/drawingml/2011/main" val="1"/>
             </a:ext>
           </a:extLst>
         </p:spPr>
@@ -16452,7 +16452,7 @@
           </a:ln>
           <a:extLst>
             <a:ext uri="{C572A759-6A51-4108-AA02-DFA0A04FC94B}">
-              <ma14:wrappingTextBoxFlag xmlns:ma14="http://schemas.microsoft.com/office/mac/drawingml/2011/main" xmlns:a14="http://schemas.microsoft.com/office/drawing/2010/main" xmlns:m="http://schemas.openxmlformats.org/officeDocument/2006/math" xmlns="" val="1"/>
+              <ma14:wrappingTextBoxFlag xmlns="" xmlns:m="http://schemas.openxmlformats.org/officeDocument/2006/math" xmlns:a14="http://schemas.microsoft.com/office/drawing/2010/main" xmlns:ma14="http://schemas.microsoft.com/office/mac/drawingml/2011/main" val="1"/>
             </a:ext>
           </a:extLst>
         </p:spPr>
@@ -16817,7 +16817,7 @@
           </a:ln>
           <a:extLst>
             <a:ext uri="{C572A759-6A51-4108-AA02-DFA0A04FC94B}">
-              <ma14:wrappingTextBoxFlag xmlns:ma14="http://schemas.microsoft.com/office/mac/drawingml/2011/main" xmlns:a14="http://schemas.microsoft.com/office/drawing/2010/main" xmlns:m="http://schemas.openxmlformats.org/officeDocument/2006/math" xmlns="" val="1"/>
+              <ma14:wrappingTextBoxFlag xmlns="" xmlns:m="http://schemas.openxmlformats.org/officeDocument/2006/math" xmlns:a14="http://schemas.microsoft.com/office/drawing/2010/main" xmlns:ma14="http://schemas.microsoft.com/office/mac/drawingml/2011/main" val="1"/>
             </a:ext>
           </a:extLst>
         </p:spPr>
@@ -16986,7 +16986,7 @@
           </a:ln>
           <a:extLst>
             <a:ext uri="{C572A759-6A51-4108-AA02-DFA0A04FC94B}">
-              <ma14:wrappingTextBoxFlag xmlns:ma14="http://schemas.microsoft.com/office/mac/drawingml/2011/main" xmlns:a14="http://schemas.microsoft.com/office/drawing/2010/main" xmlns:m="http://schemas.openxmlformats.org/officeDocument/2006/math" xmlns="" val="1"/>
+              <ma14:wrappingTextBoxFlag xmlns="" xmlns:m="http://schemas.openxmlformats.org/officeDocument/2006/math" xmlns:a14="http://schemas.microsoft.com/office/drawing/2010/main" xmlns:ma14="http://schemas.microsoft.com/office/mac/drawingml/2011/main" val="1"/>
             </a:ext>
           </a:extLst>
         </p:spPr>
@@ -17478,7 +17478,7 @@
           </a:ln>
           <a:extLst>
             <a:ext uri="{C572A759-6A51-4108-AA02-DFA0A04FC94B}">
-              <ma14:wrappingTextBoxFlag xmlns="" xmlns:m="http://schemas.openxmlformats.org/officeDocument/2006/math" xmlns:a14="http://schemas.microsoft.com/office/drawing/2010/main" xmlns:ma14="http://schemas.microsoft.com/office/mac/drawingml/2011/main" val="1"/>
+              <ma14:wrappingTextBoxFlag xmlns:ma14="http://schemas.microsoft.com/office/mac/drawingml/2011/main" xmlns:a14="http://schemas.microsoft.com/office/drawing/2010/main" xmlns:m="http://schemas.openxmlformats.org/officeDocument/2006/math" xmlns="" val="1"/>
             </a:ext>
           </a:extLst>
         </p:spPr>
@@ -18104,8 +18104,8 @@
         </p:nvSpPr>
         <p:spPr>
           <a:xfrm>
-            <a:off x="1779105" y="1807319"/>
-            <a:ext cx="8975035" cy="2062103"/>
+            <a:off x="1779105" y="2032606"/>
+            <a:ext cx="8975035" cy="1754326"/>
           </a:xfrm>
           <a:prstGeom prst="rect">
             <a:avLst/>
@@ -18138,7 +18138,7 @@
           <a:p>
             <a:pPr algn="ctr" hangingPunct="0"/>
             <a:r>
-              <a:rPr lang="en-US" sz="6400" dirty="0">
+              <a:rPr lang="en-US" sz="5400" dirty="0">
                 <a:solidFill>
                   <a:schemeClr val="accent5">
                     <a:lumMod val="75000"/>
@@ -18370,7 +18370,7 @@
           </a:ln>
           <a:extLst>
             <a:ext uri="{C572A759-6A51-4108-AA02-DFA0A04FC94B}">
-              <ma14:wrappingTextBoxFlag xmlns="" xmlns:m="http://schemas.openxmlformats.org/officeDocument/2006/math" xmlns:a14="http://schemas.microsoft.com/office/drawing/2010/main" xmlns:ma14="http://schemas.microsoft.com/office/mac/drawingml/2011/main" val="1"/>
+              <ma14:wrappingTextBoxFlag xmlns:ma14="http://schemas.microsoft.com/office/mac/drawingml/2011/main" xmlns:a14="http://schemas.microsoft.com/office/drawing/2010/main" xmlns:m="http://schemas.openxmlformats.org/officeDocument/2006/math" xmlns="" val="1"/>
             </a:ext>
           </a:extLst>
         </p:spPr>
